--- a/assets/img/SA/SACAS_speakers.pptx
+++ b/assets/img/SA/SACAS_speakers.pptx
@@ -328,7 +328,7 @@
           <a:p>
             <a:fld id="{A08ED64D-2B45-499B-A6B0-9A84B873FF7F}" type="datetimeFigureOut">
               <a:rPr lang="zh-CN" altLang="en-US" smtClean="0"/>
-              <a:t>2026/4/13</a:t>
+              <a:t>2026/5/7</a:t>
             </a:fld>
             <a:endParaRPr lang="zh-CN" altLang="en-US"/>
           </a:p>
@@ -2474,7 +2474,7 @@
                 <a:cs typeface="+mn-cs"/>
               </a:rPr>
               <a:pPr/>
-              <a:t>2026/4/13</a:t>
+              <a:t>2026/5/7</a:t>
             </a:fld>
             <a:endParaRPr lang="zh-CN" altLang="en-US" sz="1350" kern="1200">
               <a:solidFill>
@@ -2630,7 +2630,7 @@
                 <a:cs typeface="+mn-cs"/>
               </a:rPr>
               <a:pPr/>
-              <a:t>2026/4/13</a:t>
+              <a:t>2026/5/7</a:t>
             </a:fld>
             <a:endParaRPr lang="zh-CN" altLang="en-US" sz="1350" kern="1200">
               <a:solidFill>
@@ -2968,7 +2968,7 @@
                 <a:cs typeface="+mn-cs"/>
               </a:rPr>
               <a:pPr/>
-              <a:t>2026/4/13</a:t>
+              <a:t>2026/5/7</a:t>
             </a:fld>
             <a:endParaRPr lang="zh-CN" altLang="en-US" sz="1350" kern="1200">
               <a:solidFill>
@@ -3286,7 +3286,7 @@
                 <a:cs typeface="+mn-cs"/>
               </a:rPr>
               <a:pPr/>
-              <a:t>2026/4/13</a:t>
+              <a:t>2026/5/7</a:t>
             </a:fld>
             <a:endParaRPr lang="zh-CN" altLang="en-US" sz="1350" kern="1200">
               <a:solidFill>
@@ -3517,7 +3517,7 @@
                 <a:cs typeface="+mn-cs"/>
               </a:rPr>
               <a:pPr/>
-              <a:t>2026/4/13</a:t>
+              <a:t>2026/5/7</a:t>
             </a:fld>
             <a:endParaRPr lang="zh-CN" altLang="en-US" sz="1350" kern="1200">
               <a:solidFill>
@@ -3758,7 +3758,7 @@
                 <a:cs typeface="+mn-cs"/>
               </a:rPr>
               <a:pPr/>
-              <a:t>2026/4/13</a:t>
+              <a:t>2026/5/7</a:t>
             </a:fld>
             <a:endParaRPr lang="zh-CN" altLang="en-US" sz="1350" kern="1200">
               <a:solidFill>
@@ -5515,7 +5515,7 @@
                 <a:cs typeface="+mn-cs"/>
               </a:rPr>
               <a:pPr/>
-              <a:t>2026/4/13</a:t>
+              <a:t>2026/5/7</a:t>
             </a:fld>
             <a:endParaRPr lang="zh-CN" altLang="en-US" sz="1350" kern="1200">
               <a:solidFill>
@@ -6425,7 +6425,7 @@
                 <a:cs typeface="+mn-cs"/>
               </a:rPr>
               <a:pPr/>
-              <a:t>2026/4/13</a:t>
+              <a:t>2026/5/7</a:t>
             </a:fld>
             <a:endParaRPr lang="zh-CN" altLang="en-US" sz="1350" kern="1200">
               <a:solidFill>
@@ -6718,7 +6718,7 @@
                 <a:cs typeface="+mn-cs"/>
               </a:rPr>
               <a:pPr/>
-              <a:t>2026/4/13</a:t>
+              <a:t>2026/5/7</a:t>
             </a:fld>
             <a:endParaRPr lang="zh-CN" altLang="en-US" sz="1350" kern="1200">
               <a:solidFill>
@@ -7146,7 +7146,7 @@
                 <a:cs typeface="+mn-cs"/>
               </a:rPr>
               <a:pPr/>
-              <a:t>2026/4/13</a:t>
+              <a:t>2026/5/7</a:t>
             </a:fld>
             <a:endParaRPr lang="zh-CN" altLang="en-US" sz="1350" kern="1200">
               <a:solidFill>
@@ -13843,14 +13843,14 @@
           <p:nvPr>
             <p:extLst>
               <p:ext uri="{D42A27DB-BD31-4B8C-83A1-F6EECF244321}">
-                <p14:modId xmlns:p14="http://schemas.microsoft.com/office/powerpoint/2010/main" val="2225294457"/>
+                <p14:modId xmlns:p14="http://schemas.microsoft.com/office/powerpoint/2010/main" val="3789591541"/>
               </p:ext>
             </p:extLst>
           </p:nvPr>
         </p:nvGraphicFramePr>
         <p:xfrm>
           <a:off x="0" y="212760"/>
-          <a:ext cx="9144000" cy="4561820"/>
+          <a:ext cx="9144000" cy="4707517"/>
         </p:xfrm>
         <a:graphic>
           <a:graphicData uri="http://schemas.openxmlformats.org/drawingml/2006/table">
@@ -14041,7 +14041,7 @@
                   </a:ext>
                 </a:extLst>
               </a:tr>
-              <a:tr h="376366">
+              <a:tr h="522063">
                 <a:tc>
                   <a:txBody>
                     <a:bodyPr/>
@@ -14123,23 +14123,37 @@
                     <a:bodyPr/>
                     <a:lstStyle/>
                     <a:p>
-                      <a:pPr marL="0" marR="0">
+                      <a:pPr marL="0" marR="0" lvl="0" indent="0" algn="l" defTabSz="914400" rtl="0" eaLnBrk="1" fontAlgn="auto" latinLnBrk="0" hangingPunct="1">
+                        <a:lnSpc>
+                          <a:spcPct val="100000"/>
+                        </a:lnSpc>
+                        <a:spcBef>
+                          <a:spcPts val="0"/>
+                        </a:spcBef>
+                        <a:spcAft>
+                          <a:spcPts val="0"/>
+                        </a:spcAft>
+                        <a:buClrTx/>
+                        <a:buSzTx/>
+                        <a:buFontTx/>
                         <a:buNone/>
+                        <a:tabLst/>
+                        <a:defRPr/>
                       </a:pPr>
                       <a:r>
-                        <a:rPr lang="en-US" sz="1000" kern="100" dirty="0">
+                        <a:rPr lang="en-US" altLang="zh-SG" sz="1000" kern="100" dirty="0">
                           <a:effectLst/>
                           <a:latin typeface="Arial" panose="020B0604020202020204" pitchFamily="34" charset="0"/>
                           <a:ea typeface="DengXian" panose="02010600030101010101" pitchFamily="2" charset="-122"/>
                           <a:cs typeface="Times New Roman" panose="02020603050405020304" pitchFamily="18" charset="0"/>
                         </a:rPr>
-                        <a:t>IEEE SA PM: Best Practices for IEEE standards development</a:t>
+                        <a:t>Updates for P3468: Standard for Chiplet Interface Circuit</a:t>
                       </a:r>
-                      <a:endParaRPr lang="en-SG" sz="1200" kern="100" dirty="0">
+                      <a:endParaRPr lang="en-CA" altLang="zh-SG" sz="1100" kern="100" dirty="0">
                         <a:effectLst/>
-                        <a:latin typeface="Calibri" panose="020F0502020204030204" pitchFamily="34" charset="0"/>
-                        <a:ea typeface="PMingLiU" panose="02020500000000000000" pitchFamily="18" charset="-120"/>
-                        <a:cs typeface="Times New Roman" panose="02020603050405020304" pitchFamily="18" charset="0"/>
+                        <a:latin typeface="Arial" panose="020B0604020202020204" pitchFamily="34" charset="0"/>
+                        <a:ea typeface="等线" panose="02010600030101010101" pitchFamily="2" charset="-122"/>
+                        <a:cs typeface="Arial" panose="020B0604020202020204" pitchFamily="34" charset="0"/>
                       </a:endParaRPr>
                     </a:p>
                   </a:txBody>
@@ -14150,42 +14164,25 @@
                     <a:bodyPr/>
                     <a:lstStyle/>
                     <a:p>
-                      <a:pPr marL="0" marR="0">
-                        <a:buNone/>
+                      <a:pPr marL="12700" algn="just">
+                        <a:spcBef>
+                          <a:spcPts val="204"/>
+                        </a:spcBef>
                       </a:pPr>
                       <a:r>
-                        <a:rPr lang="en-US" sz="1000" b="1" kern="100" dirty="0">
-                          <a:effectLst/>
+                        <a:rPr lang="en-US" altLang="zh-SG" sz="1000" b="0" dirty="0" err="1">
                           <a:latin typeface="Arial" panose="020B0604020202020204" pitchFamily="34" charset="0"/>
-                          <a:ea typeface="DengXian" panose="02010600030101010101" pitchFamily="2" charset="-122"/>
-                          <a:cs typeface="Times New Roman" panose="02020603050405020304" pitchFamily="18" charset="0"/>
+                          <a:cs typeface="Arial" panose="020B0604020202020204" pitchFamily="34" charset="0"/>
                         </a:rPr>
-                        <a:t>Christian Orlando</a:t>
+                        <a:t>Qinfen</a:t>
                       </a:r>
                       <a:r>
-                        <a:rPr lang="en-SG" sz="1200" b="1" kern="100" dirty="0">
-                          <a:effectLst/>
-                          <a:latin typeface="Calibri" panose="020F0502020204030204" pitchFamily="34" charset="0"/>
-                          <a:ea typeface="PMingLiU" panose="02020500000000000000" pitchFamily="18" charset="-120"/>
-                          <a:cs typeface="Times New Roman" panose="02020603050405020304" pitchFamily="18" charset="0"/>
+                        <a:rPr lang="en-US" altLang="zh-SG" sz="1000" b="0" dirty="0">
+                          <a:latin typeface="Arial" panose="020B0604020202020204" pitchFamily="34" charset="0"/>
+                          <a:cs typeface="Arial" panose="020B0604020202020204" pitchFamily="34" charset="0"/>
                         </a:rPr>
-                        <a:t> </a:t>
+                        <a:t> Hao, Professor, Chinese Academy of Sciences, China</a:t>
                       </a:r>
-                      <a:r>
-                        <a:rPr lang="en-US" sz="1000" kern="100" dirty="0">
-                          <a:effectLst/>
-                          <a:latin typeface="Arial" panose="020B0604020202020204" pitchFamily="34" charset="0"/>
-                          <a:ea typeface="DengXian" panose="02010600030101010101" pitchFamily="2" charset="-122"/>
-                          <a:cs typeface="Times New Roman" panose="02020603050405020304" pitchFamily="18" charset="0"/>
-                        </a:rPr>
-                        <a:t>IEEE SA PM</a:t>
-                      </a:r>
-                      <a:endParaRPr lang="en-SG" sz="1200" kern="100" dirty="0">
-                        <a:effectLst/>
-                        <a:latin typeface="Calibri" panose="020F0502020204030204" pitchFamily="34" charset="0"/>
-                        <a:ea typeface="PMingLiU" panose="02020500000000000000" pitchFamily="18" charset="-120"/>
-                        <a:cs typeface="Times New Roman" panose="02020603050405020304" pitchFamily="18" charset="0"/>
-                      </a:endParaRPr>
                     </a:p>
                   </a:txBody>
                   <a:tcPr marL="68580" marR="68580" marT="0" marB="0"/>
@@ -14367,7 +14364,20 @@
                         <a:rPr lang="en-US" sz="1000" dirty="0">
                           <a:latin typeface="+mn-lt"/>
                         </a:rPr>
-                        <a:t>Shafi Syed (Senior Direction, GF), Sri Chandrasekaran(IEEE SA), WG Chairs, Ang Boon Chong (SASD Chair), Moderator: Yi(Estelle) Wang (Global head of CE, </a:t>
+                        <a:t>Shafi Syed (Senior Direction, GF), Sri Chandrasekaran(IEEE SA), </a:t>
+                      </a:r>
+                      <a:r>
+                        <a:rPr lang="en-US" sz="1000" b="0" dirty="0">
+                          <a:latin typeface="Arial" panose="020B0604020202020204" pitchFamily="34" charset="0"/>
+                          <a:cs typeface="Arial" panose="020B0604020202020204" pitchFamily="34" charset="0"/>
+                        </a:rPr>
+                        <a:t>Johann Knechtel (</a:t>
+                      </a:r>
+                      <a:r>
+                        <a:rPr lang="en-US" sz="1000" dirty="0">
+                          <a:latin typeface="+mn-lt"/>
+                        </a:rPr>
+                        <a:t>WG Chair), Ang Boon Chong (SASD Chair), Moderator: Yi(Estelle) Wang (Global head of CE, </a:t>
                       </a:r>
                       <a:r>
                         <a:rPr lang="en-US" sz="1000" dirty="0" err="1">
@@ -14598,7 +14608,7 @@
                           <a:ea typeface="DengXian" panose="02010600030101010101" pitchFamily="2" charset="-122"/>
                           <a:cs typeface="Times New Roman" panose="02020603050405020304" pitchFamily="18" charset="0"/>
                         </a:rPr>
-                        <a:t>Energy-Efficient mixed-signal designs for implantable devices</a:t>
+                        <a:t>Key Circuit Design for Neural Modulation ICs</a:t>
                       </a:r>
                       <a:endParaRPr lang="en-SG" sz="1200" kern="100" dirty="0">
                         <a:effectLst/>
@@ -14625,25 +14635,7 @@
                           <a:ea typeface="DengXian" panose="02010600030101010101" pitchFamily="2" charset="-122"/>
                           <a:cs typeface="Times New Roman" panose="02020603050405020304" pitchFamily="18" charset="0"/>
                         </a:rPr>
-                        <a:t>Hong Zhang, Professor, Xi’an </a:t>
-                      </a:r>
-                      <a:r>
-                        <a:rPr lang="en-US" sz="1000" kern="100" dirty="0" err="1">
-                          <a:effectLst/>
-                          <a:latin typeface="Arial" panose="020B0604020202020204" pitchFamily="34" charset="0"/>
-                          <a:ea typeface="DengXian" panose="02010600030101010101" pitchFamily="2" charset="-122"/>
-                          <a:cs typeface="Times New Roman" panose="02020603050405020304" pitchFamily="18" charset="0"/>
-                        </a:rPr>
-                        <a:t>Jiaotong</a:t>
-                      </a:r>
-                      <a:r>
-                        <a:rPr lang="en-US" sz="1000" kern="100" dirty="0">
-                          <a:effectLst/>
-                          <a:latin typeface="Arial" panose="020B0604020202020204" pitchFamily="34" charset="0"/>
-                          <a:ea typeface="DengXian" panose="02010600030101010101" pitchFamily="2" charset="-122"/>
-                          <a:cs typeface="Times New Roman" panose="02020603050405020304" pitchFamily="18" charset="0"/>
-                        </a:rPr>
-                        <a:t> University</a:t>
+                        <a:t>Xu Liu, Associate Professor, Beijing University of Technology</a:t>
                       </a:r>
                       <a:endParaRPr lang="en-SG" sz="1200" kern="100" dirty="0">
                         <a:effectLst/>
